--- a/decks/hist-tudors/hist-tudors_ch3_edward.pptx
+++ b/decks/hist-tudors/hist-tudors_ch3_edward.pptx
@@ -123,29 +123,29 @@
   <p:extLst>
     <p:ext uri="{521415D9-36F7-43E2-AB2F-B90AF26B5E84}">
       <p14:sectionLst xmlns:p14="http://schemas.microsoft.com/office/powerpoint/2010/main">
-        <p14:section name="Opening" id="{3fa0b36b-bf90-27f6-e560-fab0e42f7172}">
+        <p14:section name="Opening" id="{cbe02497-ab35-f120-6ec0-79d8b38798aa}">
           <p14:sldIdLst>
             <p14:sldId id="256"/>
           </p14:sldIdLst>
         </p14:section>
-        <p14:section name="Gate" id="{efa15791-4699-654e-1798-3820c3680337}">
+        <p14:section name="Gate" id="{28b01929-1d2d-d3c5-6479-563122f4fde4}">
           <p14:sldIdLst>
             <p14:sldId id="257"/>
             <p14:sldId id="258"/>
           </p14:sldIdLst>
         </p14:section>
-        <p14:section name="Pre-teach" id="{90bef339-0541-3699-592c-89cc22c3ab5c}">
+        <p14:section name="Pre-teach" id="{3505e01e-e87d-3e75-09b7-3d3f06ed32a8}">
           <p14:sldIdLst>
             <p14:sldId id="259"/>
           </p14:sldIdLst>
         </p14:section>
-        <p14:section name="Read-along" id="{6118ffe4-6c01-cbf7-87b8-6b0d3d281bb7}">
+        <p14:section name="Read-along" id="{c770c450-fe73-b79d-eb01-6af313448d56}">
           <p14:sldIdLst>
             <p14:sldId id="260"/>
             <p14:sldId id="261"/>
           </p14:sldIdLst>
         </p14:section>
-        <p14:section name="Teach" id="{c31895b4-d440-111f-8dfa-e7546c9272d7}">
+        <p14:section name="Teach" id="{a69b5b25-23cd-3764-af60-2d84a239a420}">
           <p14:sldIdLst>
             <p14:sldId id="262"/>
             <p14:sldId id="263"/>
@@ -153,19 +153,19 @@
             <p14:sldId id="265"/>
           </p14:sldIdLst>
         </p14:section>
-        <p14:section name="Routes" id="{7acd0913-bf15-30f4-7f76-dfe3a3142af3}">
+        <p14:section name="Routes" id="{c76909e5-237d-d726-0862-772ad7f32fac}">
           <p14:sldIdLst>
             <p14:sldId id="266"/>
             <p14:sldId id="267"/>
             <p14:sldId id="268"/>
           </p14:sldIdLst>
         </p14:section>
-        <p14:section name="Close" id="{151d4fc0-23e1-af92-b00c-9d7e9c0449f2}">
+        <p14:section name="Close" id="{aad3b254-bc85-be72-dbf9-b9d6858b0eef}">
           <p14:sldIdLst>
             <p14:sldId id="269"/>
           </p14:sldIdLst>
         </p14:section>
-        <p14:section name="Answers" id="{6535a8fe-55c3-0c77-c755-ebd2c6156329}">
+        <p14:section name="Answers" id="{5e28c162-5d72-0c90-8e74-73a4f3f97da7}">
           <p14:sldIdLst>
             <p14:sldId id="270"/>
             <p14:sldId id="271"/>
